--- a/media/exports/reports/2025-12/overtime.pptx
+++ b/media/exports/reports/2025-12/overtime.pptx
@@ -217,49 +217,49 @@
                 <c:formatCode>0.0"%";[Red](0.0"%")</c:formatCode>
                 <c:ptCount val="15"/>
                 <c:pt idx="0">
-                  <c:v>1.5</c:v>
+                  <c:v>1.6</c:v>
                 </c:pt>
                 <c:pt idx="1">
-                  <c:v>1.3</c:v>
+                  <c:v>2.7</c:v>
                 </c:pt>
                 <c:pt idx="2">
-                  <c:v>1.9</c:v>
+                  <c:v>2.2</c:v>
                 </c:pt>
                 <c:pt idx="3">
-                  <c:v>2.3</c:v>
+                  <c:v>3.0</c:v>
                 </c:pt>
                 <c:pt idx="4">
-                  <c:v>2.8</c:v>
+                  <c:v>4.6</c:v>
                 </c:pt>
                 <c:pt idx="5">
-                  <c:v>2.4</c:v>
+                  <c:v>4.4</c:v>
                 </c:pt>
                 <c:pt idx="6">
                   <c:v>3.6</c:v>
                 </c:pt>
                 <c:pt idx="7">
-                  <c:v>2.6</c:v>
+                  <c:v>3.7</c:v>
                 </c:pt>
                 <c:pt idx="8">
                   <c:v>2.8</c:v>
                 </c:pt>
                 <c:pt idx="9">
-                  <c:v>2.4</c:v>
+                  <c:v>3.3</c:v>
                 </c:pt>
                 <c:pt idx="10">
-                  <c:v>4.6</c:v>
+                  <c:v>3.3</c:v>
                 </c:pt>
                 <c:pt idx="11">
-                  <c:v>3.0</c:v>
+                  <c:v>3.7</c:v>
                 </c:pt>
                 <c:pt idx="12">
-                  <c:v>4.0</c:v>
+                  <c:v>3.9</c:v>
                 </c:pt>
                 <c:pt idx="13">
-                  <c:v>3.9</c:v>
+                  <c:v>3.8</c:v>
                 </c:pt>
                 <c:pt idx="14">
-                  <c:v>3.5</c:v>
+                  <c:v>7.7</c:v>
                 </c:pt>
               </c:numCache>
             </c:numRef>
@@ -308,7 +308,7 @@
         <c:axId val="-2100718248"/>
         <c:scaling>
           <c:orientation val="minMax"/>
-          <c:max val="5.0"/>
+          <c:max val="10.0"/>
           <c:min val="0.0"/>
         </c:scaling>
         <c:delete val="0"/>
@@ -343,7 +343,7 @@
         <c:crossAx val="-2101159928"/>
         <c:crosses val="autoZero"/>
         <c:crossBetween val="midCat"/>
-        <c:majorUnit val="1.0"/>
+        <c:majorUnit val="2.0"/>
       </c:valAx>
     </c:plotArea>
     <c:plotVisOnly val="1"/>
@@ -461,16 +461,16 @@
                 <c:formatCode>#,##0;[Red](#,##0)</c:formatCode>
                 <c:ptCount val="4"/>
                 <c:pt idx="0">
-                  <c:v>4.0</c:v>
+                  <c:v>9.5</c:v>
                 </c:pt>
                 <c:pt idx="1">
-                  <c:v>11.0</c:v>
+                  <c:v>12.5</c:v>
                 </c:pt>
                 <c:pt idx="2">
-                  <c:v>11.0</c:v>
+                  <c:v>18.5</c:v>
                 </c:pt>
                 <c:pt idx="3">
-                  <c:v>12.0</c:v>
+                  <c:v>30.0</c:v>
                 </c:pt>
               </c:numCache>
             </c:numRef>
@@ -534,7 +534,7 @@
       <c:valAx>
         <c:axId val="-2113994440"/>
         <c:scaling>
-          <c:max val="13.799999999999999"/>
+          <c:max val="34.5"/>
           <c:min val="0.0"/>
         </c:scaling>
         <c:delete/>
@@ -648,69 +648,55 @@
               </a:solidFill>
             </c:spPr>
           </c:dPt>
-          <c:dPt>
-            <c:idx val="6"/>
-            <c:spPr>
-              <a:solidFill>
-                <a:srgbClr val="0E9F6E"/>
-              </a:solidFill>
-            </c:spPr>
-          </c:dPt>
           <c:cat>
             <c:strRef>
-              <c:f>Sheet1!$A$2:$A$8</c:f>
+              <c:f>Sheet1!$A$2:$A$7</c:f>
               <c:strCache>
-                <c:ptCount val="7"/>
+                <c:ptCount val="6"/>
                 <c:pt idx="0">
-                  <c:v>Technician T5</c:v>
+                  <c:v>Technician T1</c:v>
                 </c:pt>
                 <c:pt idx="1">
                   <c:v>Technician T2</c:v>
                 </c:pt>
                 <c:pt idx="2">
-                  <c:v>Technician T7</c:v>
+                  <c:v>Technician T3</c:v>
                 </c:pt>
                 <c:pt idx="3">
+                  <c:v>Technician T6</c:v>
+                </c:pt>
+                <c:pt idx="4">
                   <c:v>Technician T4</c:v>
                 </c:pt>
-                <c:pt idx="4">
-                  <c:v>Technician T6</c:v>
-                </c:pt>
                 <c:pt idx="5">
-                  <c:v>Technician T1</c:v>
-                </c:pt>
-                <c:pt idx="6">
-                  <c:v>Technician T3</c:v>
+                  <c:v>Technician T5</c:v>
                 </c:pt>
               </c:strCache>
             </c:strRef>
           </c:cat>
           <c:val>
             <c:numRef>
-              <c:f>Sheet1!$B$2:$B$8</c:f>
+              <c:f>Sheet1!$B$2:$B$7</c:f>
               <c:numCache>
                 <c:formatCode>#,##0;[Red](#,##0)</c:formatCode>
-                <c:ptCount val="7"/>
+                <c:ptCount val="6"/>
                 <c:pt idx="0">
-                  <c:v>0.5</c:v>
+                  <c:v>7.0</c:v>
                 </c:pt>
                 <c:pt idx="1">
-                  <c:v>2.5</c:v>
+                  <c:v>8.5</c:v>
                 </c:pt>
                 <c:pt idx="2">
-                  <c:v>4.5</c:v>
+                  <c:v>8.5</c:v>
                 </c:pt>
                 <c:pt idx="3">
-                  <c:v>6.5</c:v>
+                  <c:v>15.0</c:v>
                 </c:pt>
                 <c:pt idx="4">
-                  <c:v>7.0</c:v>
+                  <c:v>15.5</c:v>
                 </c:pt>
                 <c:pt idx="5">
-                  <c:v>7.5</c:v>
-                </c:pt>
-                <c:pt idx="6">
-                  <c:v>9.5</c:v>
+                  <c:v>16.0</c:v>
                 </c:pt>
               </c:numCache>
             </c:numRef>
@@ -774,7 +760,7 @@
       <c:valAx>
         <c:axId val="-2113994440"/>
         <c:scaling>
-          <c:max val="10.924999999999999"/>
+          <c:max val="18.4"/>
           <c:min val="0.0"/>
         </c:scaling>
         <c:delete/>
@@ -1271,7 +1257,7 @@
           <a:lstStyle/>
           <a:p>
             <a:r>
-              <a:t>Where is overtime creeping up, and why?. Overtime, December: 3.5%; Overtime hours, December: 38.0 h; December last year: 1.9%. Technicians worked 38.0 h of overtime in December, 3.5% of ordinary hours (target under 5.0%), against 3.9% in November. Over the last year it has gone from 1.9% to 3.5%. After-hours call-out is the main reason: 12.0 h, 31.6% of the overtime. Technician T3 carried the most (9.5 h).</a:t>
+              <a:t>Where is overtime creeping up, and why?. Overtime, December: 7.7%; Overtime hours, December: 70.5 h; December last year: 2.2%. Technicians worked 70.5 h of overtime in December, 7.7% of ordinary hours (target under 5.0%), against 3.8% in November. Over the last year it has gone from 2.2% to 7.7%. After-hours call-out is the main reason: 30.0 h, 42.6% of the overtime. Technician T5 carried the most (16.0 h). Above target by 24.5 h.</a:t>
             </a:r>
           </a:p>
         </p:txBody>
@@ -4826,7 +4812,7 @@
                 </a:solidFill>
                 <a:latin typeface="Roboto"/>
               </a:rPr>
-              <a:t>Data retrieved 2pm, Tue 6 Oct 2026 · Generated 8 Oct 2026, 6:29pm · Sample data · Made with Python (python-pptx)</a:t>
+              <a:t>Data retrieved 2pm, Tue 6 Oct 2026 · Generated 8 Oct 2026, 11:41pm · Sample data · Made with Python (python-pptx)</a:t>
             </a:r>
           </a:p>
         </p:txBody>
@@ -5168,11 +5154,11 @@
             <a:r>
               <a:rPr sz="2200" b="1">
                 <a:solidFill>
-                  <a:srgbClr val="2F7A5D"/>
+                  <a:srgbClr val="B42318"/>
                 </a:solidFill>
                 <a:latin typeface="Roboto"/>
               </a:rPr>
-              <a:t>3.5%</a:t>
+              <a:t>7.7%</a:t>
             </a:r>
           </a:p>
         </p:txBody>
@@ -5338,7 +5324,7 @@
                 </a:solidFill>
                 <a:latin typeface="Roboto"/>
               </a:rPr>
-              <a:t>38.0 h</a:t>
+              <a:t>70.5 h</a:t>
             </a:r>
           </a:p>
         </p:txBody>
@@ -5377,7 +5363,7 @@
                 </a:solidFill>
                 <a:latin typeface="Roboto"/>
               </a:rPr>
-              <a:t>November 39.5 h</a:t>
+              <a:t>November 32.0 h</a:t>
             </a:r>
           </a:p>
         </p:txBody>
@@ -5504,7 +5490,7 @@
                 </a:solidFill>
                 <a:latin typeface="Roboto"/>
               </a:rPr>
-              <a:t>1.9%</a:t>
+              <a:t>2.2%</a:t>
             </a:r>
           </a:p>
         </p:txBody>
@@ -5543,7 +5529,7 @@
                 </a:solidFill>
                 <a:latin typeface="Roboto"/>
               </a:rPr>
-              <a:t>19.0 h of overtime</a:t>
+              <a:t>19.5 h of overtime</a:t>
             </a:r>
           </a:p>
         </p:txBody>
@@ -5688,7 +5674,7 @@
                 </a:solidFill>
                 <a:latin typeface="Roboto"/>
               </a:rPr>
-              <a:t>Technicians worked 38.0 h of overtime in December, 3.5% of ordinary hours (target under 5.0%), against 3.9% in November. Over the last year it has gone from 1.9% to 3.5%.</a:t>
+              <a:t>Technicians worked 70.5 h of overtime in December, 7.7% of ordinary hours (target under 5.0%), against 3.8% in November. Over the last year it has gone from 2.2% to 7.7%.</a:t>
             </a:r>
           </a:p>
         </p:txBody>
@@ -5815,7 +5801,7 @@
                 </a:solidFill>
                 <a:latin typeface="Roboto"/>
               </a:rPr>
-              <a:t>After-hours call-out is the main reason: 12.0 h, 31.6% of the overtime. Technician T3 carried the most (9.5 h).</a:t>
+              <a:t>After-hours call-out is the main reason: 30.0 h, 42.6% of the overtime. Technician T5 carried the most (16.0 h). Above target by 24.5 h.</a:t>
             </a:r>
           </a:p>
         </p:txBody>
@@ -5893,7 +5879,7 @@
                 </a:solidFill>
                 <a:latin typeface="Roboto"/>
               </a:rPr>
-              <a:t>Data retrieved 2pm, Tue 6 Oct 2026 · Generated 8 Oct 2026, 6:29pm · Sample data · Made with Python (python-pptx)</a:t>
+              <a:t>Data retrieved 2pm, Tue 6 Oct 2026 · Generated 8 Oct 2026, 11:41pm · Sample data · Made with Python (python-pptx)</a:t>
             </a:r>
           </a:p>
         </p:txBody>
@@ -6208,7 +6194,7 @@
                 </a:solidFill>
                 <a:latin typeface="Roboto"/>
               </a:rPr>
-              <a:t>Data retrieved 2pm, Tue 6 Oct 2026 · Generated 8 Oct 2026, 6:29pm · Sample data · Made with Python (python-pptx)</a:t>
+              <a:t>Data retrieved 2pm, Tue 6 Oct 2026 · Generated 8 Oct 2026, 11:41pm · Sample data · Made with Python (python-pptx)</a:t>
             </a:r>
           </a:p>
         </p:txBody>
@@ -6523,7 +6509,7 @@
                 </a:solidFill>
                 <a:latin typeface="Roboto"/>
               </a:rPr>
-              <a:t>Data retrieved 2pm, Tue 6 Oct 2026 · Generated 8 Oct 2026, 6:29pm · Sample data · Made with Python (python-pptx)</a:t>
+              <a:t>Data retrieved 2pm, Tue 6 Oct 2026 · Generated 8 Oct 2026, 11:41pm · Sample data · Made with Python (python-pptx)</a:t>
             </a:r>
           </a:p>
         </p:txBody>

--- a/media/exports/reports/2025-12/overtime.pptx
+++ b/media/exports/reports/2025-12/overtime.pptx
@@ -1187,7 +1187,7 @@
           <a:lstStyle/>
           <a:p>
             <a:r>
-              <a:t>Where is overtime creeping up, and why?. Sample Electrical &amp; Air Pty Ltd. Period: December 2025. Each technician's paid hours, day by day: ordinary hours and overtime, with the main reason for the overtime.</a:t>
+              <a:t>Where is overtime creeping up, and why?. Sample Electrical &amp; Air Pty Ltd. Period: December 2025. In short: Overtime was 7.7% of ordinary hours in December (target under 5.0%), up from 2.2% a year earlier. Each technician's paid hours, day by day: ordinary hours and overtime, with the main reason for the overtime.</a:t>
             </a:r>
           </a:p>
         </p:txBody>
@@ -4647,7 +4647,7 @@
                 </a:solidFill>
                 <a:latin typeface="Roboto"/>
               </a:rPr>
-              <a:t>Period: December 2025. Each technician's paid hours, day by day: ordinary hours and overtime, with the main reason for the overtime.</a:t>
+              <a:t>Period: December 2025. In short: Overtime was 7.7% of ordinary hours in December (target under 5.0%), up from 2.2% a year earlier. Each technician's paid hours, day by day: ordinary hours and overtime, with the main reason for the overtime.</a:t>
             </a:r>
           </a:p>
         </p:txBody>
@@ -4812,7 +4812,7 @@
                 </a:solidFill>
                 <a:latin typeface="Roboto"/>
               </a:rPr>
-              <a:t>Data retrieved 2pm, Tue 6 Oct 2026 · Generated 8 Oct 2026, 11:41pm · Sample data · Made with Python (python-pptx)</a:t>
+              <a:t>Data retrieved 2pm, Tue 6 Oct 2026 · Generated 10 Oct 2026, 9:55pm · Sample data · Made with Python (python-pptx)</a:t>
             </a:r>
           </a:p>
         </p:txBody>
@@ -5879,7 +5879,7 @@
                 </a:solidFill>
                 <a:latin typeface="Roboto"/>
               </a:rPr>
-              <a:t>Data retrieved 2pm, Tue 6 Oct 2026 · Generated 8 Oct 2026, 11:41pm · Sample data · Made with Python (python-pptx)</a:t>
+              <a:t>Data retrieved 2pm, Tue 6 Oct 2026 · Generated 10 Oct 2026, 9:55pm · Sample data · Made with Python (python-pptx)</a:t>
             </a:r>
           </a:p>
         </p:txBody>
@@ -6194,7 +6194,7 @@
                 </a:solidFill>
                 <a:latin typeface="Roboto"/>
               </a:rPr>
-              <a:t>Data retrieved 2pm, Tue 6 Oct 2026 · Generated 8 Oct 2026, 11:41pm · Sample data · Made with Python (python-pptx)</a:t>
+              <a:t>Data retrieved 2pm, Tue 6 Oct 2026 · Generated 10 Oct 2026, 9:55pm · Sample data · Made with Python (python-pptx)</a:t>
             </a:r>
           </a:p>
         </p:txBody>
@@ -6509,7 +6509,7 @@
                 </a:solidFill>
                 <a:latin typeface="Roboto"/>
               </a:rPr>
-              <a:t>Data retrieved 2pm, Tue 6 Oct 2026 · Generated 8 Oct 2026, 11:41pm · Sample data · Made with Python (python-pptx)</a:t>
+              <a:t>Data retrieved 2pm, Tue 6 Oct 2026 · Generated 10 Oct 2026, 9:55pm · Sample data · Made with Python (python-pptx)</a:t>
             </a:r>
           </a:p>
         </p:txBody>
